--- a/Final Paper/semantic_drift_defense_slides.pptx
+++ b/Final Paper/semantic_drift_defense_slides.pptx
@@ -11190,7 +11190,7 @@
                 </a:solidFill>
                 <a:latin typeface="Calibri"/>
               </a:rPr>
-              <a:t>Scoped for a single contributor, 30 days, pretrained models only, free-tier compute.</a:t>
+              <a:t>Uses only pretrained models: no training or fine-tuning of any editing model.</a:t>
             </a:r>
           </a:p>
         </p:txBody>
